--- a/public/videos/repositories/subsidy-alert-hub/subsidy-alert-hub-tech-preview.pptx
+++ b/public/videos/repositories/subsidy-alert-hub/subsidy-alert-hub-tech-preview.pptx
@@ -134,7 +134,7 @@
           <p:cNvPr id="2" name="タイトル 1">
             <a:extLst>
               <a:ext uri="{FF2B5EF4-FFF2-40B4-BE49-F238E27FC236}">
-                <a16:creationId xmlns:a16="http://schemas.microsoft.com/office/drawing/2014/main" id="{B62AE2DD-63BF-165D-DAF1-21C83A1C40F7}"/>
+                <a16:creationId xmlns:a16="http://schemas.microsoft.com/office/drawing/2014/main" id="{DE510E27-C921-0E0C-9958-EEB98AEDA2F6}"/>
               </a:ext>
             </a:extLst>
           </p:cNvPr>
@@ -171,7 +171,7 @@
           <p:cNvPr id="3" name="字幕 2">
             <a:extLst>
               <a:ext uri="{FF2B5EF4-FFF2-40B4-BE49-F238E27FC236}">
-                <a16:creationId xmlns:a16="http://schemas.microsoft.com/office/drawing/2014/main" id="{67C94CE7-7047-6A56-C108-0D4A299C736E}"/>
+                <a16:creationId xmlns:a16="http://schemas.microsoft.com/office/drawing/2014/main" id="{E78EAFA7-851D-BCC7-DCA7-72D503DCCE9D}"/>
               </a:ext>
             </a:extLst>
           </p:cNvPr>
@@ -241,7 +241,7 @@
           <p:cNvPr id="4" name="日付プレースホルダー 3">
             <a:extLst>
               <a:ext uri="{FF2B5EF4-FFF2-40B4-BE49-F238E27FC236}">
-                <a16:creationId xmlns:a16="http://schemas.microsoft.com/office/drawing/2014/main" id="{101C1EC2-77C2-295C-86DF-82EF4958F410}"/>
+                <a16:creationId xmlns:a16="http://schemas.microsoft.com/office/drawing/2014/main" id="{C91FD3BC-DD80-967B-B156-0EDDBCEF1601}"/>
               </a:ext>
             </a:extLst>
           </p:cNvPr>
@@ -257,7 +257,7 @@
           <a:bodyPr/>
           <a:lstStyle/>
           <a:p>
-            <a:fld id="{946492BE-38DD-4152-9E8B-A4D8DCE62082}" type="datetimeFigureOut">
+            <a:fld id="{7C5BE10C-A21E-478E-B6B3-D393C4487310}" type="datetimeFigureOut">
               <a:rPr kumimoji="1" lang="ja-JP" altLang="en-US" smtClean="0"/>
               <a:t>2026/7/30</a:t>
             </a:fld>
@@ -270,7 +270,7 @@
           <p:cNvPr id="5" name="フッター プレースホルダー 4">
             <a:extLst>
               <a:ext uri="{FF2B5EF4-FFF2-40B4-BE49-F238E27FC236}">
-                <a16:creationId xmlns:a16="http://schemas.microsoft.com/office/drawing/2014/main" id="{2E1F5AD1-B34C-2C65-820A-341159B055AF}"/>
+                <a16:creationId xmlns:a16="http://schemas.microsoft.com/office/drawing/2014/main" id="{1289F83A-CF0D-E313-B4D4-0A0922CC962F}"/>
               </a:ext>
             </a:extLst>
           </p:cNvPr>
@@ -295,7 +295,7 @@
           <p:cNvPr id="6" name="スライド番号プレースホルダー 5">
             <a:extLst>
               <a:ext uri="{FF2B5EF4-FFF2-40B4-BE49-F238E27FC236}">
-                <a16:creationId xmlns:a16="http://schemas.microsoft.com/office/drawing/2014/main" id="{DD007F1E-3700-52A7-F6AE-1DFC0FFAB4A1}"/>
+                <a16:creationId xmlns:a16="http://schemas.microsoft.com/office/drawing/2014/main" id="{EEB015D2-CF5C-21A4-494F-DAC72852A4DA}"/>
               </a:ext>
             </a:extLst>
           </p:cNvPr>
@@ -311,7 +311,7 @@
           <a:bodyPr/>
           <a:lstStyle/>
           <a:p>
-            <a:fld id="{98CDB7A6-B724-4084-9325-B8E8EC2C1071}" type="slidenum">
+            <a:fld id="{EF76F379-17DE-44B4-9186-B977EFFAAEA0}" type="slidenum">
               <a:rPr kumimoji="1" lang="ja-JP" altLang="en-US" smtClean="0"/>
               <a:t>‹#›</a:t>
             </a:fld>
@@ -322,7 +322,7 @@
     </p:spTree>
     <p:extLst>
       <p:ext uri="{BB962C8B-B14F-4D97-AF65-F5344CB8AC3E}">
-        <p14:creationId xmlns:p14="http://schemas.microsoft.com/office/powerpoint/2010/main" val="1981943492"/>
+        <p14:creationId xmlns:p14="http://schemas.microsoft.com/office/powerpoint/2010/main" val="2855280736"/>
       </p:ext>
     </p:extLst>
   </p:cSld>
@@ -354,7 +354,7 @@
           <p:cNvPr id="2" name="タイトル 1">
             <a:extLst>
               <a:ext uri="{FF2B5EF4-FFF2-40B4-BE49-F238E27FC236}">
-                <a16:creationId xmlns:a16="http://schemas.microsoft.com/office/drawing/2014/main" id="{92F42672-BEA5-7245-BAA5-6CE157FFD557}"/>
+                <a16:creationId xmlns:a16="http://schemas.microsoft.com/office/drawing/2014/main" id="{B96CEA75-D614-F97E-47BF-597AED76F583}"/>
               </a:ext>
             </a:extLst>
           </p:cNvPr>
@@ -382,7 +382,7 @@
           <p:cNvPr id="3" name="縦書きテキスト プレースホルダー 2">
             <a:extLst>
               <a:ext uri="{FF2B5EF4-FFF2-40B4-BE49-F238E27FC236}">
-                <a16:creationId xmlns:a16="http://schemas.microsoft.com/office/drawing/2014/main" id="{C94A64C9-16D6-86C1-888F-299CED81CA85}"/>
+                <a16:creationId xmlns:a16="http://schemas.microsoft.com/office/drawing/2014/main" id="{DED610E9-0F54-5243-F54D-6CC88A373DBB}"/>
               </a:ext>
             </a:extLst>
           </p:cNvPr>
@@ -471,7 +471,7 @@
           <p:cNvPr id="4" name="日付プレースホルダー 3">
             <a:extLst>
               <a:ext uri="{FF2B5EF4-FFF2-40B4-BE49-F238E27FC236}">
-                <a16:creationId xmlns:a16="http://schemas.microsoft.com/office/drawing/2014/main" id="{8B394E8B-05DC-802F-5993-59B49EEE1615}"/>
+                <a16:creationId xmlns:a16="http://schemas.microsoft.com/office/drawing/2014/main" id="{6C204AE7-63C8-7499-B29F-4E6BB8AA88AC}"/>
               </a:ext>
             </a:extLst>
           </p:cNvPr>
@@ -487,7 +487,7 @@
           <a:bodyPr/>
           <a:lstStyle/>
           <a:p>
-            <a:fld id="{946492BE-38DD-4152-9E8B-A4D8DCE62082}" type="datetimeFigureOut">
+            <a:fld id="{7C5BE10C-A21E-478E-B6B3-D393C4487310}" type="datetimeFigureOut">
               <a:rPr kumimoji="1" lang="ja-JP" altLang="en-US" smtClean="0"/>
               <a:t>2026/7/30</a:t>
             </a:fld>
@@ -500,7 +500,7 @@
           <p:cNvPr id="5" name="フッター プレースホルダー 4">
             <a:extLst>
               <a:ext uri="{FF2B5EF4-FFF2-40B4-BE49-F238E27FC236}">
-                <a16:creationId xmlns:a16="http://schemas.microsoft.com/office/drawing/2014/main" id="{AFDF210F-72A3-D74D-B0C6-472FA37D7183}"/>
+                <a16:creationId xmlns:a16="http://schemas.microsoft.com/office/drawing/2014/main" id="{D0A3B998-A920-6630-3F05-E79E5017E6D3}"/>
               </a:ext>
             </a:extLst>
           </p:cNvPr>
@@ -525,7 +525,7 @@
           <p:cNvPr id="6" name="スライド番号プレースホルダー 5">
             <a:extLst>
               <a:ext uri="{FF2B5EF4-FFF2-40B4-BE49-F238E27FC236}">
-                <a16:creationId xmlns:a16="http://schemas.microsoft.com/office/drawing/2014/main" id="{5321778A-CBDD-5B33-A679-160E765E720A}"/>
+                <a16:creationId xmlns:a16="http://schemas.microsoft.com/office/drawing/2014/main" id="{F8F9E2C4-FC6E-06D3-453D-B56EEF55E51F}"/>
               </a:ext>
             </a:extLst>
           </p:cNvPr>
@@ -541,7 +541,7 @@
           <a:bodyPr/>
           <a:lstStyle/>
           <a:p>
-            <a:fld id="{98CDB7A6-B724-4084-9325-B8E8EC2C1071}" type="slidenum">
+            <a:fld id="{EF76F379-17DE-44B4-9186-B977EFFAAEA0}" type="slidenum">
               <a:rPr kumimoji="1" lang="ja-JP" altLang="en-US" smtClean="0"/>
               <a:t>‹#›</a:t>
             </a:fld>
@@ -552,7 +552,7 @@
     </p:spTree>
     <p:extLst>
       <p:ext uri="{BB962C8B-B14F-4D97-AF65-F5344CB8AC3E}">
-        <p14:creationId xmlns:p14="http://schemas.microsoft.com/office/powerpoint/2010/main" val="2861523940"/>
+        <p14:creationId xmlns:p14="http://schemas.microsoft.com/office/powerpoint/2010/main" val="1133357856"/>
       </p:ext>
     </p:extLst>
   </p:cSld>
@@ -584,7 +584,7 @@
           <p:cNvPr id="2" name="縦書きタイトル 1">
             <a:extLst>
               <a:ext uri="{FF2B5EF4-FFF2-40B4-BE49-F238E27FC236}">
-                <a16:creationId xmlns:a16="http://schemas.microsoft.com/office/drawing/2014/main" id="{E46ED306-14FE-30BD-315D-C9DC21C9A707}"/>
+                <a16:creationId xmlns:a16="http://schemas.microsoft.com/office/drawing/2014/main" id="{A93B5076-583C-220B-01AB-796237D53CB6}"/>
               </a:ext>
             </a:extLst>
           </p:cNvPr>
@@ -617,7 +617,7 @@
           <p:cNvPr id="3" name="縦書きテキスト プレースホルダー 2">
             <a:extLst>
               <a:ext uri="{FF2B5EF4-FFF2-40B4-BE49-F238E27FC236}">
-                <a16:creationId xmlns:a16="http://schemas.microsoft.com/office/drawing/2014/main" id="{48209790-4935-4855-4DC9-AEA489AE916A}"/>
+                <a16:creationId xmlns:a16="http://schemas.microsoft.com/office/drawing/2014/main" id="{8BE3DCD5-666C-A799-1BF5-8CE34DC9E549}"/>
               </a:ext>
             </a:extLst>
           </p:cNvPr>
@@ -711,7 +711,7 @@
           <p:cNvPr id="4" name="日付プレースホルダー 3">
             <a:extLst>
               <a:ext uri="{FF2B5EF4-FFF2-40B4-BE49-F238E27FC236}">
-                <a16:creationId xmlns:a16="http://schemas.microsoft.com/office/drawing/2014/main" id="{73BE469E-E821-5ACC-BB92-AC8678FFAD28}"/>
+                <a16:creationId xmlns:a16="http://schemas.microsoft.com/office/drawing/2014/main" id="{423B851A-6ED9-A646-1C27-92F1C03A0F92}"/>
               </a:ext>
             </a:extLst>
           </p:cNvPr>
@@ -727,7 +727,7 @@
           <a:bodyPr/>
           <a:lstStyle/>
           <a:p>
-            <a:fld id="{946492BE-38DD-4152-9E8B-A4D8DCE62082}" type="datetimeFigureOut">
+            <a:fld id="{7C5BE10C-A21E-478E-B6B3-D393C4487310}" type="datetimeFigureOut">
               <a:rPr kumimoji="1" lang="ja-JP" altLang="en-US" smtClean="0"/>
               <a:t>2026/7/30</a:t>
             </a:fld>
@@ -740,7 +740,7 @@
           <p:cNvPr id="5" name="フッター プレースホルダー 4">
             <a:extLst>
               <a:ext uri="{FF2B5EF4-FFF2-40B4-BE49-F238E27FC236}">
-                <a16:creationId xmlns:a16="http://schemas.microsoft.com/office/drawing/2014/main" id="{14EF60EB-CC30-0279-8D40-965A6B0460F1}"/>
+                <a16:creationId xmlns:a16="http://schemas.microsoft.com/office/drawing/2014/main" id="{F560EF0B-AF32-0508-D2E9-10360925D173}"/>
               </a:ext>
             </a:extLst>
           </p:cNvPr>
@@ -765,7 +765,7 @@
           <p:cNvPr id="6" name="スライド番号プレースホルダー 5">
             <a:extLst>
               <a:ext uri="{FF2B5EF4-FFF2-40B4-BE49-F238E27FC236}">
-                <a16:creationId xmlns:a16="http://schemas.microsoft.com/office/drawing/2014/main" id="{AA13B91D-C7E0-E25B-5F28-09646E5AD570}"/>
+                <a16:creationId xmlns:a16="http://schemas.microsoft.com/office/drawing/2014/main" id="{AE60F937-621F-60F3-9FED-22FB92FD1FC2}"/>
               </a:ext>
             </a:extLst>
           </p:cNvPr>
@@ -781,7 +781,7 @@
           <a:bodyPr/>
           <a:lstStyle/>
           <a:p>
-            <a:fld id="{98CDB7A6-B724-4084-9325-B8E8EC2C1071}" type="slidenum">
+            <a:fld id="{EF76F379-17DE-44B4-9186-B977EFFAAEA0}" type="slidenum">
               <a:rPr kumimoji="1" lang="ja-JP" altLang="en-US" smtClean="0"/>
               <a:t>‹#›</a:t>
             </a:fld>
@@ -792,7 +792,7 @@
     </p:spTree>
     <p:extLst>
       <p:ext uri="{BB962C8B-B14F-4D97-AF65-F5344CB8AC3E}">
-        <p14:creationId xmlns:p14="http://schemas.microsoft.com/office/powerpoint/2010/main" val="1599222159"/>
+        <p14:creationId xmlns:p14="http://schemas.microsoft.com/office/powerpoint/2010/main" val="3625812870"/>
       </p:ext>
     </p:extLst>
   </p:cSld>
@@ -824,7 +824,7 @@
           <p:cNvPr id="2" name="タイトル 1">
             <a:extLst>
               <a:ext uri="{FF2B5EF4-FFF2-40B4-BE49-F238E27FC236}">
-                <a16:creationId xmlns:a16="http://schemas.microsoft.com/office/drawing/2014/main" id="{AC5E21EA-C9AF-DC61-3412-8DE6D7B0C9F2}"/>
+                <a16:creationId xmlns:a16="http://schemas.microsoft.com/office/drawing/2014/main" id="{393F2FC0-AFA4-60A4-1918-E2225560CE73}"/>
               </a:ext>
             </a:extLst>
           </p:cNvPr>
@@ -852,7 +852,7 @@
           <p:cNvPr id="3" name="コンテンツ プレースホルダー 2">
             <a:extLst>
               <a:ext uri="{FF2B5EF4-FFF2-40B4-BE49-F238E27FC236}">
-                <a16:creationId xmlns:a16="http://schemas.microsoft.com/office/drawing/2014/main" id="{C5F11F4A-C749-6043-F3BB-1B7DC23B4E8C}"/>
+                <a16:creationId xmlns:a16="http://schemas.microsoft.com/office/drawing/2014/main" id="{18E9B816-3C33-1C7E-6D6F-6BD9B8546A05}"/>
               </a:ext>
             </a:extLst>
           </p:cNvPr>
@@ -941,7 +941,7 @@
           <p:cNvPr id="4" name="日付プレースホルダー 3">
             <a:extLst>
               <a:ext uri="{FF2B5EF4-FFF2-40B4-BE49-F238E27FC236}">
-                <a16:creationId xmlns:a16="http://schemas.microsoft.com/office/drawing/2014/main" id="{9C6DD97D-7476-73AF-0CC2-924B9F2F8ED8}"/>
+                <a16:creationId xmlns:a16="http://schemas.microsoft.com/office/drawing/2014/main" id="{A24573C8-B45D-A57E-3BB5-C1EC62F0C32B}"/>
               </a:ext>
             </a:extLst>
           </p:cNvPr>
@@ -957,7 +957,7 @@
           <a:bodyPr/>
           <a:lstStyle/>
           <a:p>
-            <a:fld id="{946492BE-38DD-4152-9E8B-A4D8DCE62082}" type="datetimeFigureOut">
+            <a:fld id="{7C5BE10C-A21E-478E-B6B3-D393C4487310}" type="datetimeFigureOut">
               <a:rPr kumimoji="1" lang="ja-JP" altLang="en-US" smtClean="0"/>
               <a:t>2026/7/30</a:t>
             </a:fld>
@@ -970,7 +970,7 @@
           <p:cNvPr id="5" name="フッター プレースホルダー 4">
             <a:extLst>
               <a:ext uri="{FF2B5EF4-FFF2-40B4-BE49-F238E27FC236}">
-                <a16:creationId xmlns:a16="http://schemas.microsoft.com/office/drawing/2014/main" id="{9C578F2F-429F-3F4E-D690-BCA71C1F4E47}"/>
+                <a16:creationId xmlns:a16="http://schemas.microsoft.com/office/drawing/2014/main" id="{7FE65240-74D7-E1CA-E4F8-FEFA36C38F6C}"/>
               </a:ext>
             </a:extLst>
           </p:cNvPr>
@@ -995,7 +995,7 @@
           <p:cNvPr id="6" name="スライド番号プレースホルダー 5">
             <a:extLst>
               <a:ext uri="{FF2B5EF4-FFF2-40B4-BE49-F238E27FC236}">
-                <a16:creationId xmlns:a16="http://schemas.microsoft.com/office/drawing/2014/main" id="{218587B4-8AA2-CFEB-7B3E-B5B6AD29040B}"/>
+                <a16:creationId xmlns:a16="http://schemas.microsoft.com/office/drawing/2014/main" id="{ACF43A6D-1050-E430-207F-E2D9354C9AF8}"/>
               </a:ext>
             </a:extLst>
           </p:cNvPr>
@@ -1011,7 +1011,7 @@
           <a:bodyPr/>
           <a:lstStyle/>
           <a:p>
-            <a:fld id="{98CDB7A6-B724-4084-9325-B8E8EC2C1071}" type="slidenum">
+            <a:fld id="{EF76F379-17DE-44B4-9186-B977EFFAAEA0}" type="slidenum">
               <a:rPr kumimoji="1" lang="ja-JP" altLang="en-US" smtClean="0"/>
               <a:t>‹#›</a:t>
             </a:fld>
@@ -1022,7 +1022,7 @@
     </p:spTree>
     <p:extLst>
       <p:ext uri="{BB962C8B-B14F-4D97-AF65-F5344CB8AC3E}">
-        <p14:creationId xmlns:p14="http://schemas.microsoft.com/office/powerpoint/2010/main" val="3903298102"/>
+        <p14:creationId xmlns:p14="http://schemas.microsoft.com/office/powerpoint/2010/main" val="3424813849"/>
       </p:ext>
     </p:extLst>
   </p:cSld>
@@ -1054,7 +1054,7 @@
           <p:cNvPr id="2" name="タイトル 1">
             <a:extLst>
               <a:ext uri="{FF2B5EF4-FFF2-40B4-BE49-F238E27FC236}">
-                <a16:creationId xmlns:a16="http://schemas.microsoft.com/office/drawing/2014/main" id="{0A534E50-9C98-21C4-9DD5-53CF14B97987}"/>
+                <a16:creationId xmlns:a16="http://schemas.microsoft.com/office/drawing/2014/main" id="{0BC42645-89CB-1F63-BBF4-BDB9A59CE625}"/>
               </a:ext>
             </a:extLst>
           </p:cNvPr>
@@ -1091,7 +1091,7 @@
           <p:cNvPr id="3" name="テキスト プレースホルダー 2">
             <a:extLst>
               <a:ext uri="{FF2B5EF4-FFF2-40B4-BE49-F238E27FC236}">
-                <a16:creationId xmlns:a16="http://schemas.microsoft.com/office/drawing/2014/main" id="{68C47A6D-36EE-924F-1FC7-655D0EC24974}"/>
+                <a16:creationId xmlns:a16="http://schemas.microsoft.com/office/drawing/2014/main" id="{4F366D48-FC15-16E1-DBA1-1A9B2CF230B9}"/>
               </a:ext>
             </a:extLst>
           </p:cNvPr>
@@ -1216,7 +1216,7 @@
           <p:cNvPr id="4" name="日付プレースホルダー 3">
             <a:extLst>
               <a:ext uri="{FF2B5EF4-FFF2-40B4-BE49-F238E27FC236}">
-                <a16:creationId xmlns:a16="http://schemas.microsoft.com/office/drawing/2014/main" id="{48D6491B-4134-DFC9-4F7B-2EA1BA4C7557}"/>
+                <a16:creationId xmlns:a16="http://schemas.microsoft.com/office/drawing/2014/main" id="{7806BCA0-13DA-AFED-21DD-E6C75C8A86DC}"/>
               </a:ext>
             </a:extLst>
           </p:cNvPr>
@@ -1232,7 +1232,7 @@
           <a:bodyPr/>
           <a:lstStyle/>
           <a:p>
-            <a:fld id="{946492BE-38DD-4152-9E8B-A4D8DCE62082}" type="datetimeFigureOut">
+            <a:fld id="{7C5BE10C-A21E-478E-B6B3-D393C4487310}" type="datetimeFigureOut">
               <a:rPr kumimoji="1" lang="ja-JP" altLang="en-US" smtClean="0"/>
               <a:t>2026/7/30</a:t>
             </a:fld>
@@ -1245,7 +1245,7 @@
           <p:cNvPr id="5" name="フッター プレースホルダー 4">
             <a:extLst>
               <a:ext uri="{FF2B5EF4-FFF2-40B4-BE49-F238E27FC236}">
-                <a16:creationId xmlns:a16="http://schemas.microsoft.com/office/drawing/2014/main" id="{8648EE5C-E471-1DF3-88A3-92A5827E41ED}"/>
+                <a16:creationId xmlns:a16="http://schemas.microsoft.com/office/drawing/2014/main" id="{856F6E7F-5E76-06DB-AB3C-B9BB7A039D10}"/>
               </a:ext>
             </a:extLst>
           </p:cNvPr>
@@ -1270,7 +1270,7 @@
           <p:cNvPr id="6" name="スライド番号プレースホルダー 5">
             <a:extLst>
               <a:ext uri="{FF2B5EF4-FFF2-40B4-BE49-F238E27FC236}">
-                <a16:creationId xmlns:a16="http://schemas.microsoft.com/office/drawing/2014/main" id="{972B7D23-9FC7-BD33-C39E-B24AA128A10F}"/>
+                <a16:creationId xmlns:a16="http://schemas.microsoft.com/office/drawing/2014/main" id="{EDA052AD-5BF0-0CCC-DA4E-A9FACB379D6F}"/>
               </a:ext>
             </a:extLst>
           </p:cNvPr>
@@ -1286,7 +1286,7 @@
           <a:bodyPr/>
           <a:lstStyle/>
           <a:p>
-            <a:fld id="{98CDB7A6-B724-4084-9325-B8E8EC2C1071}" type="slidenum">
+            <a:fld id="{EF76F379-17DE-44B4-9186-B977EFFAAEA0}" type="slidenum">
               <a:rPr kumimoji="1" lang="ja-JP" altLang="en-US" smtClean="0"/>
               <a:t>‹#›</a:t>
             </a:fld>
@@ -1297,7 +1297,7 @@
     </p:spTree>
     <p:extLst>
       <p:ext uri="{BB962C8B-B14F-4D97-AF65-F5344CB8AC3E}">
-        <p14:creationId xmlns:p14="http://schemas.microsoft.com/office/powerpoint/2010/main" val="2719870352"/>
+        <p14:creationId xmlns:p14="http://schemas.microsoft.com/office/powerpoint/2010/main" val="2441248104"/>
       </p:ext>
     </p:extLst>
   </p:cSld>
@@ -1329,7 +1329,7 @@
           <p:cNvPr id="2" name="タイトル 1">
             <a:extLst>
               <a:ext uri="{FF2B5EF4-FFF2-40B4-BE49-F238E27FC236}">
-                <a16:creationId xmlns:a16="http://schemas.microsoft.com/office/drawing/2014/main" id="{1F913908-3813-6C1B-1277-C6F6DE8845BA}"/>
+                <a16:creationId xmlns:a16="http://schemas.microsoft.com/office/drawing/2014/main" id="{9779A185-866E-6B58-20AF-384FB81C1382}"/>
               </a:ext>
             </a:extLst>
           </p:cNvPr>
@@ -1357,7 +1357,7 @@
           <p:cNvPr id="3" name="コンテンツ プレースホルダー 2">
             <a:extLst>
               <a:ext uri="{FF2B5EF4-FFF2-40B4-BE49-F238E27FC236}">
-                <a16:creationId xmlns:a16="http://schemas.microsoft.com/office/drawing/2014/main" id="{7ABC9760-D916-97A3-D2B5-F581DBAD7B48}"/>
+                <a16:creationId xmlns:a16="http://schemas.microsoft.com/office/drawing/2014/main" id="{29896E38-F742-E098-5C16-DC29CB464005}"/>
               </a:ext>
             </a:extLst>
           </p:cNvPr>
@@ -1451,7 +1451,7 @@
           <p:cNvPr id="4" name="コンテンツ プレースホルダー 3">
             <a:extLst>
               <a:ext uri="{FF2B5EF4-FFF2-40B4-BE49-F238E27FC236}">
-                <a16:creationId xmlns:a16="http://schemas.microsoft.com/office/drawing/2014/main" id="{D63F456A-B64F-F515-9C57-C0C24E84F4F4}"/>
+                <a16:creationId xmlns:a16="http://schemas.microsoft.com/office/drawing/2014/main" id="{2378ED18-6982-B354-339C-ED44DF6F2E50}"/>
               </a:ext>
             </a:extLst>
           </p:cNvPr>
@@ -1545,7 +1545,7 @@
           <p:cNvPr id="5" name="日付プレースホルダー 4">
             <a:extLst>
               <a:ext uri="{FF2B5EF4-FFF2-40B4-BE49-F238E27FC236}">
-                <a16:creationId xmlns:a16="http://schemas.microsoft.com/office/drawing/2014/main" id="{DC8E2074-034B-B971-8FEB-B5D047F0F5CB}"/>
+                <a16:creationId xmlns:a16="http://schemas.microsoft.com/office/drawing/2014/main" id="{30101381-8652-220F-0CCA-40AEE613F3F9}"/>
               </a:ext>
             </a:extLst>
           </p:cNvPr>
@@ -1561,7 +1561,7 @@
           <a:bodyPr/>
           <a:lstStyle/>
           <a:p>
-            <a:fld id="{946492BE-38DD-4152-9E8B-A4D8DCE62082}" type="datetimeFigureOut">
+            <a:fld id="{7C5BE10C-A21E-478E-B6B3-D393C4487310}" type="datetimeFigureOut">
               <a:rPr kumimoji="1" lang="ja-JP" altLang="en-US" smtClean="0"/>
               <a:t>2026/7/30</a:t>
             </a:fld>
@@ -1574,7 +1574,7 @@
           <p:cNvPr id="6" name="フッター プレースホルダー 5">
             <a:extLst>
               <a:ext uri="{FF2B5EF4-FFF2-40B4-BE49-F238E27FC236}">
-                <a16:creationId xmlns:a16="http://schemas.microsoft.com/office/drawing/2014/main" id="{5A792759-330B-57D4-74AE-6BC9CB4E71C3}"/>
+                <a16:creationId xmlns:a16="http://schemas.microsoft.com/office/drawing/2014/main" id="{16180151-4C2A-489D-95E3-8386E2DE30D0}"/>
               </a:ext>
             </a:extLst>
           </p:cNvPr>
@@ -1599,7 +1599,7 @@
           <p:cNvPr id="7" name="スライド番号プレースホルダー 6">
             <a:extLst>
               <a:ext uri="{FF2B5EF4-FFF2-40B4-BE49-F238E27FC236}">
-                <a16:creationId xmlns:a16="http://schemas.microsoft.com/office/drawing/2014/main" id="{7FA387D2-E586-7E0B-57B4-C0B3895A791E}"/>
+                <a16:creationId xmlns:a16="http://schemas.microsoft.com/office/drawing/2014/main" id="{19E2AE33-B6AA-0D98-AF28-AA48897D3FBE}"/>
               </a:ext>
             </a:extLst>
           </p:cNvPr>
@@ -1615,7 +1615,7 @@
           <a:bodyPr/>
           <a:lstStyle/>
           <a:p>
-            <a:fld id="{98CDB7A6-B724-4084-9325-B8E8EC2C1071}" type="slidenum">
+            <a:fld id="{EF76F379-17DE-44B4-9186-B977EFFAAEA0}" type="slidenum">
               <a:rPr kumimoji="1" lang="ja-JP" altLang="en-US" smtClean="0"/>
               <a:t>‹#›</a:t>
             </a:fld>
@@ -1626,7 +1626,7 @@
     </p:spTree>
     <p:extLst>
       <p:ext uri="{BB962C8B-B14F-4D97-AF65-F5344CB8AC3E}">
-        <p14:creationId xmlns:p14="http://schemas.microsoft.com/office/powerpoint/2010/main" val="2253412229"/>
+        <p14:creationId xmlns:p14="http://schemas.microsoft.com/office/powerpoint/2010/main" val="490991450"/>
       </p:ext>
     </p:extLst>
   </p:cSld>
@@ -1658,7 +1658,7 @@
           <p:cNvPr id="2" name="タイトル 1">
             <a:extLst>
               <a:ext uri="{FF2B5EF4-FFF2-40B4-BE49-F238E27FC236}">
-                <a16:creationId xmlns:a16="http://schemas.microsoft.com/office/drawing/2014/main" id="{6A83FC7E-422F-C394-179B-1428615D3158}"/>
+                <a16:creationId xmlns:a16="http://schemas.microsoft.com/office/drawing/2014/main" id="{6F0D703E-7984-B270-FDFF-9C65D1A6CE86}"/>
               </a:ext>
             </a:extLst>
           </p:cNvPr>
@@ -1691,7 +1691,7 @@
           <p:cNvPr id="3" name="テキスト プレースホルダー 2">
             <a:extLst>
               <a:ext uri="{FF2B5EF4-FFF2-40B4-BE49-F238E27FC236}">
-                <a16:creationId xmlns:a16="http://schemas.microsoft.com/office/drawing/2014/main" id="{52417A32-B31F-8FA2-EE08-30F396DDDEE2}"/>
+                <a16:creationId xmlns:a16="http://schemas.microsoft.com/office/drawing/2014/main" id="{632AE5C3-1E9D-DA1D-0C87-A82C5C8F9F7C}"/>
               </a:ext>
             </a:extLst>
           </p:cNvPr>
@@ -1762,7 +1762,7 @@
           <p:cNvPr id="4" name="コンテンツ プレースホルダー 3">
             <a:extLst>
               <a:ext uri="{FF2B5EF4-FFF2-40B4-BE49-F238E27FC236}">
-                <a16:creationId xmlns:a16="http://schemas.microsoft.com/office/drawing/2014/main" id="{0D25935B-04DC-515B-D2B8-78EC49B39DE3}"/>
+                <a16:creationId xmlns:a16="http://schemas.microsoft.com/office/drawing/2014/main" id="{D51C60AB-7161-6E3F-3817-EBD6F8E89A4E}"/>
               </a:ext>
             </a:extLst>
           </p:cNvPr>
@@ -1856,7 +1856,7 @@
           <p:cNvPr id="5" name="テキスト プレースホルダー 4">
             <a:extLst>
               <a:ext uri="{FF2B5EF4-FFF2-40B4-BE49-F238E27FC236}">
-                <a16:creationId xmlns:a16="http://schemas.microsoft.com/office/drawing/2014/main" id="{819162A0-13EF-913E-8999-F61CF10F9E9B}"/>
+                <a16:creationId xmlns:a16="http://schemas.microsoft.com/office/drawing/2014/main" id="{369420ED-D42E-CC45-9D7F-ACAEC28F8C70}"/>
               </a:ext>
             </a:extLst>
           </p:cNvPr>
@@ -1927,7 +1927,7 @@
           <p:cNvPr id="6" name="コンテンツ プレースホルダー 5">
             <a:extLst>
               <a:ext uri="{FF2B5EF4-FFF2-40B4-BE49-F238E27FC236}">
-                <a16:creationId xmlns:a16="http://schemas.microsoft.com/office/drawing/2014/main" id="{1E32C496-600E-6ABC-1195-10D3FB76EF83}"/>
+                <a16:creationId xmlns:a16="http://schemas.microsoft.com/office/drawing/2014/main" id="{A1887492-C012-1EF1-AFAC-5D9F41F7F5FD}"/>
               </a:ext>
             </a:extLst>
           </p:cNvPr>
@@ -2021,7 +2021,7 @@
           <p:cNvPr id="7" name="日付プレースホルダー 6">
             <a:extLst>
               <a:ext uri="{FF2B5EF4-FFF2-40B4-BE49-F238E27FC236}">
-                <a16:creationId xmlns:a16="http://schemas.microsoft.com/office/drawing/2014/main" id="{3DD7ECDD-A0C5-DE37-878E-8762D886B6E5}"/>
+                <a16:creationId xmlns:a16="http://schemas.microsoft.com/office/drawing/2014/main" id="{D0EEB820-20A9-9662-3A12-4166E11239A7}"/>
               </a:ext>
             </a:extLst>
           </p:cNvPr>
@@ -2037,7 +2037,7 @@
           <a:bodyPr/>
           <a:lstStyle/>
           <a:p>
-            <a:fld id="{946492BE-38DD-4152-9E8B-A4D8DCE62082}" type="datetimeFigureOut">
+            <a:fld id="{7C5BE10C-A21E-478E-B6B3-D393C4487310}" type="datetimeFigureOut">
               <a:rPr kumimoji="1" lang="ja-JP" altLang="en-US" smtClean="0"/>
               <a:t>2026/7/30</a:t>
             </a:fld>
@@ -2050,7 +2050,7 @@
           <p:cNvPr id="8" name="フッター プレースホルダー 7">
             <a:extLst>
               <a:ext uri="{FF2B5EF4-FFF2-40B4-BE49-F238E27FC236}">
-                <a16:creationId xmlns:a16="http://schemas.microsoft.com/office/drawing/2014/main" id="{36C60152-75DF-8552-DBE0-173C1B836F5A}"/>
+                <a16:creationId xmlns:a16="http://schemas.microsoft.com/office/drawing/2014/main" id="{943DAA16-F0D1-9347-6466-0AAAAECE5ACA}"/>
               </a:ext>
             </a:extLst>
           </p:cNvPr>
@@ -2075,7 +2075,7 @@
           <p:cNvPr id="9" name="スライド番号プレースホルダー 8">
             <a:extLst>
               <a:ext uri="{FF2B5EF4-FFF2-40B4-BE49-F238E27FC236}">
-                <a16:creationId xmlns:a16="http://schemas.microsoft.com/office/drawing/2014/main" id="{E1018A23-901E-E511-E608-2E25D46BCE8E}"/>
+                <a16:creationId xmlns:a16="http://schemas.microsoft.com/office/drawing/2014/main" id="{83EDF30B-2C5D-FDDF-45D6-DE55FF3C8D58}"/>
               </a:ext>
             </a:extLst>
           </p:cNvPr>
@@ -2091,7 +2091,7 @@
           <a:bodyPr/>
           <a:lstStyle/>
           <a:p>
-            <a:fld id="{98CDB7A6-B724-4084-9325-B8E8EC2C1071}" type="slidenum">
+            <a:fld id="{EF76F379-17DE-44B4-9186-B977EFFAAEA0}" type="slidenum">
               <a:rPr kumimoji="1" lang="ja-JP" altLang="en-US" smtClean="0"/>
               <a:t>‹#›</a:t>
             </a:fld>
@@ -2102,7 +2102,7 @@
     </p:spTree>
     <p:extLst>
       <p:ext uri="{BB962C8B-B14F-4D97-AF65-F5344CB8AC3E}">
-        <p14:creationId xmlns:p14="http://schemas.microsoft.com/office/powerpoint/2010/main" val="3389198857"/>
+        <p14:creationId xmlns:p14="http://schemas.microsoft.com/office/powerpoint/2010/main" val="2809149646"/>
       </p:ext>
     </p:extLst>
   </p:cSld>
@@ -2134,7 +2134,7 @@
           <p:cNvPr id="2" name="タイトル 1">
             <a:extLst>
               <a:ext uri="{FF2B5EF4-FFF2-40B4-BE49-F238E27FC236}">
-                <a16:creationId xmlns:a16="http://schemas.microsoft.com/office/drawing/2014/main" id="{FBC6C505-20D4-6397-C514-E494C478D43E}"/>
+                <a16:creationId xmlns:a16="http://schemas.microsoft.com/office/drawing/2014/main" id="{84F9A8F4-C399-982D-C41F-2C6262B403DE}"/>
               </a:ext>
             </a:extLst>
           </p:cNvPr>
@@ -2162,7 +2162,7 @@
           <p:cNvPr id="3" name="日付プレースホルダー 2">
             <a:extLst>
               <a:ext uri="{FF2B5EF4-FFF2-40B4-BE49-F238E27FC236}">
-                <a16:creationId xmlns:a16="http://schemas.microsoft.com/office/drawing/2014/main" id="{7D38061F-4050-B329-5FEF-C889EFF49108}"/>
+                <a16:creationId xmlns:a16="http://schemas.microsoft.com/office/drawing/2014/main" id="{861ADEB6-F0E7-931A-F69E-6A49D476E663}"/>
               </a:ext>
             </a:extLst>
           </p:cNvPr>
@@ -2178,7 +2178,7 @@
           <a:bodyPr/>
           <a:lstStyle/>
           <a:p>
-            <a:fld id="{946492BE-38DD-4152-9E8B-A4D8DCE62082}" type="datetimeFigureOut">
+            <a:fld id="{7C5BE10C-A21E-478E-B6B3-D393C4487310}" type="datetimeFigureOut">
               <a:rPr kumimoji="1" lang="ja-JP" altLang="en-US" smtClean="0"/>
               <a:t>2026/7/30</a:t>
             </a:fld>
@@ -2191,7 +2191,7 @@
           <p:cNvPr id="4" name="フッター プレースホルダー 3">
             <a:extLst>
               <a:ext uri="{FF2B5EF4-FFF2-40B4-BE49-F238E27FC236}">
-                <a16:creationId xmlns:a16="http://schemas.microsoft.com/office/drawing/2014/main" id="{B1742B19-78AD-C29C-5DA2-62B209483DD4}"/>
+                <a16:creationId xmlns:a16="http://schemas.microsoft.com/office/drawing/2014/main" id="{3920B49C-73F1-CC98-7B77-3C98D6F2C4F3}"/>
               </a:ext>
             </a:extLst>
           </p:cNvPr>
@@ -2216,7 +2216,7 @@
           <p:cNvPr id="5" name="スライド番号プレースホルダー 4">
             <a:extLst>
               <a:ext uri="{FF2B5EF4-FFF2-40B4-BE49-F238E27FC236}">
-                <a16:creationId xmlns:a16="http://schemas.microsoft.com/office/drawing/2014/main" id="{18BD1D03-C489-4232-C86B-F39D5F5EE8DC}"/>
+                <a16:creationId xmlns:a16="http://schemas.microsoft.com/office/drawing/2014/main" id="{93196F03-21AB-91B5-0907-A6FC9BE30D83}"/>
               </a:ext>
             </a:extLst>
           </p:cNvPr>
@@ -2232,7 +2232,7 @@
           <a:bodyPr/>
           <a:lstStyle/>
           <a:p>
-            <a:fld id="{98CDB7A6-B724-4084-9325-B8E8EC2C1071}" type="slidenum">
+            <a:fld id="{EF76F379-17DE-44B4-9186-B977EFFAAEA0}" type="slidenum">
               <a:rPr kumimoji="1" lang="ja-JP" altLang="en-US" smtClean="0"/>
               <a:t>‹#›</a:t>
             </a:fld>
@@ -2243,7 +2243,7 @@
     </p:spTree>
     <p:extLst>
       <p:ext uri="{BB962C8B-B14F-4D97-AF65-F5344CB8AC3E}">
-        <p14:creationId xmlns:p14="http://schemas.microsoft.com/office/powerpoint/2010/main" val="4209021519"/>
+        <p14:creationId xmlns:p14="http://schemas.microsoft.com/office/powerpoint/2010/main" val="777791686"/>
       </p:ext>
     </p:extLst>
   </p:cSld>
@@ -2275,7 +2275,7 @@
           <p:cNvPr id="2" name="日付プレースホルダー 1">
             <a:extLst>
               <a:ext uri="{FF2B5EF4-FFF2-40B4-BE49-F238E27FC236}">
-                <a16:creationId xmlns:a16="http://schemas.microsoft.com/office/drawing/2014/main" id="{EE9B6069-52DC-F6BE-51F4-4717517D99DC}"/>
+                <a16:creationId xmlns:a16="http://schemas.microsoft.com/office/drawing/2014/main" id="{61B085EC-30E5-8611-02AC-91A35379E900}"/>
               </a:ext>
             </a:extLst>
           </p:cNvPr>
@@ -2291,7 +2291,7 @@
           <a:bodyPr/>
           <a:lstStyle/>
           <a:p>
-            <a:fld id="{946492BE-38DD-4152-9E8B-A4D8DCE62082}" type="datetimeFigureOut">
+            <a:fld id="{7C5BE10C-A21E-478E-B6B3-D393C4487310}" type="datetimeFigureOut">
               <a:rPr kumimoji="1" lang="ja-JP" altLang="en-US" smtClean="0"/>
               <a:t>2026/7/30</a:t>
             </a:fld>
@@ -2304,7 +2304,7 @@
           <p:cNvPr id="3" name="フッター プレースホルダー 2">
             <a:extLst>
               <a:ext uri="{FF2B5EF4-FFF2-40B4-BE49-F238E27FC236}">
-                <a16:creationId xmlns:a16="http://schemas.microsoft.com/office/drawing/2014/main" id="{B3D23776-F357-A6DD-0D7D-D38779A6BCDE}"/>
+                <a16:creationId xmlns:a16="http://schemas.microsoft.com/office/drawing/2014/main" id="{CBA96EA2-E62F-8C5E-8765-3B207BED4E09}"/>
               </a:ext>
             </a:extLst>
           </p:cNvPr>
@@ -2329,7 +2329,7 @@
           <p:cNvPr id="4" name="スライド番号プレースホルダー 3">
             <a:extLst>
               <a:ext uri="{FF2B5EF4-FFF2-40B4-BE49-F238E27FC236}">
-                <a16:creationId xmlns:a16="http://schemas.microsoft.com/office/drawing/2014/main" id="{A308917B-E59E-1649-2D4E-D1241A5A79E9}"/>
+                <a16:creationId xmlns:a16="http://schemas.microsoft.com/office/drawing/2014/main" id="{CD720737-D168-38B1-A4E8-EE464D139192}"/>
               </a:ext>
             </a:extLst>
           </p:cNvPr>
@@ -2345,7 +2345,7 @@
           <a:bodyPr/>
           <a:lstStyle/>
           <a:p>
-            <a:fld id="{98CDB7A6-B724-4084-9325-B8E8EC2C1071}" type="slidenum">
+            <a:fld id="{EF76F379-17DE-44B4-9186-B977EFFAAEA0}" type="slidenum">
               <a:rPr kumimoji="1" lang="ja-JP" altLang="en-US" smtClean="0"/>
               <a:t>‹#›</a:t>
             </a:fld>
@@ -2356,7 +2356,7 @@
     </p:spTree>
     <p:extLst>
       <p:ext uri="{BB962C8B-B14F-4D97-AF65-F5344CB8AC3E}">
-        <p14:creationId xmlns:p14="http://schemas.microsoft.com/office/powerpoint/2010/main" val="3862165895"/>
+        <p14:creationId xmlns:p14="http://schemas.microsoft.com/office/powerpoint/2010/main" val="1110346316"/>
       </p:ext>
     </p:extLst>
   </p:cSld>
@@ -2388,7 +2388,7 @@
           <p:cNvPr id="2" name="タイトル 1">
             <a:extLst>
               <a:ext uri="{FF2B5EF4-FFF2-40B4-BE49-F238E27FC236}">
-                <a16:creationId xmlns:a16="http://schemas.microsoft.com/office/drawing/2014/main" id="{71121476-1B21-4E4D-B956-3A532BF48096}"/>
+                <a16:creationId xmlns:a16="http://schemas.microsoft.com/office/drawing/2014/main" id="{1FE0B63A-6989-7B36-FE84-D5EBEC53A4EE}"/>
               </a:ext>
             </a:extLst>
           </p:cNvPr>
@@ -2425,7 +2425,7 @@
           <p:cNvPr id="3" name="コンテンツ プレースホルダー 2">
             <a:extLst>
               <a:ext uri="{FF2B5EF4-FFF2-40B4-BE49-F238E27FC236}">
-                <a16:creationId xmlns:a16="http://schemas.microsoft.com/office/drawing/2014/main" id="{5D5F5616-A48E-0D73-4815-FC2A1F1B25FE}"/>
+                <a16:creationId xmlns:a16="http://schemas.microsoft.com/office/drawing/2014/main" id="{99ED5E78-A262-7BD8-3585-0B597ED90D57}"/>
               </a:ext>
             </a:extLst>
           </p:cNvPr>
@@ -2547,7 +2547,7 @@
           <p:cNvPr id="4" name="テキスト プレースホルダー 3">
             <a:extLst>
               <a:ext uri="{FF2B5EF4-FFF2-40B4-BE49-F238E27FC236}">
-                <a16:creationId xmlns:a16="http://schemas.microsoft.com/office/drawing/2014/main" id="{24B8A6C9-72B3-2B06-EF2B-BD3A9BC20B4D}"/>
+                <a16:creationId xmlns:a16="http://schemas.microsoft.com/office/drawing/2014/main" id="{F0F9CA7D-1C1E-73BE-6C73-70530BAABB13}"/>
               </a:ext>
             </a:extLst>
           </p:cNvPr>
@@ -2618,7 +2618,7 @@
           <p:cNvPr id="5" name="日付プレースホルダー 4">
             <a:extLst>
               <a:ext uri="{FF2B5EF4-FFF2-40B4-BE49-F238E27FC236}">
-                <a16:creationId xmlns:a16="http://schemas.microsoft.com/office/drawing/2014/main" id="{23CAC21B-3C74-0475-FC37-FD3657D01816}"/>
+                <a16:creationId xmlns:a16="http://schemas.microsoft.com/office/drawing/2014/main" id="{86B0483C-7F47-B0CA-0DC2-BD7E10600804}"/>
               </a:ext>
             </a:extLst>
           </p:cNvPr>
@@ -2634,7 +2634,7 @@
           <a:bodyPr/>
           <a:lstStyle/>
           <a:p>
-            <a:fld id="{946492BE-38DD-4152-9E8B-A4D8DCE62082}" type="datetimeFigureOut">
+            <a:fld id="{7C5BE10C-A21E-478E-B6B3-D393C4487310}" type="datetimeFigureOut">
               <a:rPr kumimoji="1" lang="ja-JP" altLang="en-US" smtClean="0"/>
               <a:t>2026/7/30</a:t>
             </a:fld>
@@ -2647,7 +2647,7 @@
           <p:cNvPr id="6" name="フッター プレースホルダー 5">
             <a:extLst>
               <a:ext uri="{FF2B5EF4-FFF2-40B4-BE49-F238E27FC236}">
-                <a16:creationId xmlns:a16="http://schemas.microsoft.com/office/drawing/2014/main" id="{341D25CC-2EFF-5DB0-0C24-946D42C49E6F}"/>
+                <a16:creationId xmlns:a16="http://schemas.microsoft.com/office/drawing/2014/main" id="{182F9242-D16E-764B-9A5B-BCDBD3D72C36}"/>
               </a:ext>
             </a:extLst>
           </p:cNvPr>
@@ -2672,7 +2672,7 @@
           <p:cNvPr id="7" name="スライド番号プレースホルダー 6">
             <a:extLst>
               <a:ext uri="{FF2B5EF4-FFF2-40B4-BE49-F238E27FC236}">
-                <a16:creationId xmlns:a16="http://schemas.microsoft.com/office/drawing/2014/main" id="{4318C228-D947-FD5E-4AC5-411C86BDE731}"/>
+                <a16:creationId xmlns:a16="http://schemas.microsoft.com/office/drawing/2014/main" id="{07A4C737-E432-6582-453D-16D53D950B03}"/>
               </a:ext>
             </a:extLst>
           </p:cNvPr>
@@ -2688,7 +2688,7 @@
           <a:bodyPr/>
           <a:lstStyle/>
           <a:p>
-            <a:fld id="{98CDB7A6-B724-4084-9325-B8E8EC2C1071}" type="slidenum">
+            <a:fld id="{EF76F379-17DE-44B4-9186-B977EFFAAEA0}" type="slidenum">
               <a:rPr kumimoji="1" lang="ja-JP" altLang="en-US" smtClean="0"/>
               <a:t>‹#›</a:t>
             </a:fld>
@@ -2699,7 +2699,7 @@
     </p:spTree>
     <p:extLst>
       <p:ext uri="{BB962C8B-B14F-4D97-AF65-F5344CB8AC3E}">
-        <p14:creationId xmlns:p14="http://schemas.microsoft.com/office/powerpoint/2010/main" val="4234562644"/>
+        <p14:creationId xmlns:p14="http://schemas.microsoft.com/office/powerpoint/2010/main" val="1539945960"/>
       </p:ext>
     </p:extLst>
   </p:cSld>
@@ -2731,7 +2731,7 @@
           <p:cNvPr id="2" name="タイトル 1">
             <a:extLst>
               <a:ext uri="{FF2B5EF4-FFF2-40B4-BE49-F238E27FC236}">
-                <a16:creationId xmlns:a16="http://schemas.microsoft.com/office/drawing/2014/main" id="{05A8B0A8-FB33-34A9-5B40-A80AF9DB99E8}"/>
+                <a16:creationId xmlns:a16="http://schemas.microsoft.com/office/drawing/2014/main" id="{833A7486-4A36-241D-D62A-0AC25DF018FD}"/>
               </a:ext>
             </a:extLst>
           </p:cNvPr>
@@ -2768,7 +2768,7 @@
           <p:cNvPr id="3" name="図プレースホルダー 2">
             <a:extLst>
               <a:ext uri="{FF2B5EF4-FFF2-40B4-BE49-F238E27FC236}">
-                <a16:creationId xmlns:a16="http://schemas.microsoft.com/office/drawing/2014/main" id="{4B411104-B9E0-D39F-4EE3-C6D459602BCA}"/>
+                <a16:creationId xmlns:a16="http://schemas.microsoft.com/office/drawing/2014/main" id="{49728B62-BCB7-D33A-57B9-90D226FBA429}"/>
               </a:ext>
             </a:extLst>
           </p:cNvPr>
@@ -2835,7 +2835,7 @@
           <p:cNvPr id="4" name="テキスト プレースホルダー 3">
             <a:extLst>
               <a:ext uri="{FF2B5EF4-FFF2-40B4-BE49-F238E27FC236}">
-                <a16:creationId xmlns:a16="http://schemas.microsoft.com/office/drawing/2014/main" id="{E3AEAB2F-ABFE-91AF-BAE7-EB555A27EFD0}"/>
+                <a16:creationId xmlns:a16="http://schemas.microsoft.com/office/drawing/2014/main" id="{53C435EC-61A8-4AE4-9C6D-EE19B820A9E4}"/>
               </a:ext>
             </a:extLst>
           </p:cNvPr>
@@ -2906,7 +2906,7 @@
           <p:cNvPr id="5" name="日付プレースホルダー 4">
             <a:extLst>
               <a:ext uri="{FF2B5EF4-FFF2-40B4-BE49-F238E27FC236}">
-                <a16:creationId xmlns:a16="http://schemas.microsoft.com/office/drawing/2014/main" id="{B50AB7B4-7F42-1A94-F65C-AA21131AB63A}"/>
+                <a16:creationId xmlns:a16="http://schemas.microsoft.com/office/drawing/2014/main" id="{1D2EFF32-3881-FADC-32DA-389E36D6AA67}"/>
               </a:ext>
             </a:extLst>
           </p:cNvPr>
@@ -2922,7 +2922,7 @@
           <a:bodyPr/>
           <a:lstStyle/>
           <a:p>
-            <a:fld id="{946492BE-38DD-4152-9E8B-A4D8DCE62082}" type="datetimeFigureOut">
+            <a:fld id="{7C5BE10C-A21E-478E-B6B3-D393C4487310}" type="datetimeFigureOut">
               <a:rPr kumimoji="1" lang="ja-JP" altLang="en-US" smtClean="0"/>
               <a:t>2026/7/30</a:t>
             </a:fld>
@@ -2935,7 +2935,7 @@
           <p:cNvPr id="6" name="フッター プレースホルダー 5">
             <a:extLst>
               <a:ext uri="{FF2B5EF4-FFF2-40B4-BE49-F238E27FC236}">
-                <a16:creationId xmlns:a16="http://schemas.microsoft.com/office/drawing/2014/main" id="{6C54CE0E-77CD-BE02-A10E-149F41D2033F}"/>
+                <a16:creationId xmlns:a16="http://schemas.microsoft.com/office/drawing/2014/main" id="{0C089EFD-3519-A1F4-C4B0-ACC73F1F646E}"/>
               </a:ext>
             </a:extLst>
           </p:cNvPr>
@@ -2960,7 +2960,7 @@
           <p:cNvPr id="7" name="スライド番号プレースホルダー 6">
             <a:extLst>
               <a:ext uri="{FF2B5EF4-FFF2-40B4-BE49-F238E27FC236}">
-                <a16:creationId xmlns:a16="http://schemas.microsoft.com/office/drawing/2014/main" id="{69A5778E-DE40-B6E7-6179-AD8B467594DD}"/>
+                <a16:creationId xmlns:a16="http://schemas.microsoft.com/office/drawing/2014/main" id="{7FB5A7DC-C118-FA01-A2DA-B8A82E18A4A1}"/>
               </a:ext>
             </a:extLst>
           </p:cNvPr>
@@ -2976,7 +2976,7 @@
           <a:bodyPr/>
           <a:lstStyle/>
           <a:p>
-            <a:fld id="{98CDB7A6-B724-4084-9325-B8E8EC2C1071}" type="slidenum">
+            <a:fld id="{EF76F379-17DE-44B4-9186-B977EFFAAEA0}" type="slidenum">
               <a:rPr kumimoji="1" lang="ja-JP" altLang="en-US" smtClean="0"/>
               <a:t>‹#›</a:t>
             </a:fld>
@@ -2987,7 +2987,7 @@
     </p:spTree>
     <p:extLst>
       <p:ext uri="{BB962C8B-B14F-4D97-AF65-F5344CB8AC3E}">
-        <p14:creationId xmlns:p14="http://schemas.microsoft.com/office/powerpoint/2010/main" val="1045289505"/>
+        <p14:creationId xmlns:p14="http://schemas.microsoft.com/office/powerpoint/2010/main" val="2113380978"/>
       </p:ext>
     </p:extLst>
   </p:cSld>
@@ -3024,7 +3024,7 @@
           <p:cNvPr id="2" name="タイトル プレースホルダー 1">
             <a:extLst>
               <a:ext uri="{FF2B5EF4-FFF2-40B4-BE49-F238E27FC236}">
-                <a16:creationId xmlns:a16="http://schemas.microsoft.com/office/drawing/2014/main" id="{9D7A515B-03A7-4E27-2DD8-3231E8ACD192}"/>
+                <a16:creationId xmlns:a16="http://schemas.microsoft.com/office/drawing/2014/main" id="{C8B09789-5B9D-7939-828E-6651A505AC5A}"/>
               </a:ext>
             </a:extLst>
           </p:cNvPr>
@@ -3062,7 +3062,7 @@
           <p:cNvPr id="3" name="テキスト プレースホルダー 2">
             <a:extLst>
               <a:ext uri="{FF2B5EF4-FFF2-40B4-BE49-F238E27FC236}">
-                <a16:creationId xmlns:a16="http://schemas.microsoft.com/office/drawing/2014/main" id="{D89DE40D-0F77-C49F-28E9-E3F879A82D81}"/>
+                <a16:creationId xmlns:a16="http://schemas.microsoft.com/office/drawing/2014/main" id="{1FC23635-8C14-571F-B237-D5B57B121BD7}"/>
               </a:ext>
             </a:extLst>
           </p:cNvPr>
@@ -3161,7 +3161,7 @@
           <p:cNvPr id="4" name="日付プレースホルダー 3">
             <a:extLst>
               <a:ext uri="{FF2B5EF4-FFF2-40B4-BE49-F238E27FC236}">
-                <a16:creationId xmlns:a16="http://schemas.microsoft.com/office/drawing/2014/main" id="{CE194FA3-583A-0132-2DE6-C8BC33542A24}"/>
+                <a16:creationId xmlns:a16="http://schemas.microsoft.com/office/drawing/2014/main" id="{4CD2AFB3-792E-129E-A527-45C4D2C55967}"/>
               </a:ext>
             </a:extLst>
           </p:cNvPr>
@@ -3195,7 +3195,7 @@
             </a:lvl1pPr>
           </a:lstStyle>
           <a:p>
-            <a:fld id="{946492BE-38DD-4152-9E8B-A4D8DCE62082}" type="datetimeFigureOut">
+            <a:fld id="{7C5BE10C-A21E-478E-B6B3-D393C4487310}" type="datetimeFigureOut">
               <a:rPr kumimoji="1" lang="ja-JP" altLang="en-US" smtClean="0"/>
               <a:t>2026/7/30</a:t>
             </a:fld>
@@ -3208,7 +3208,7 @@
           <p:cNvPr id="5" name="フッター プレースホルダー 4">
             <a:extLst>
               <a:ext uri="{FF2B5EF4-FFF2-40B4-BE49-F238E27FC236}">
-                <a16:creationId xmlns:a16="http://schemas.microsoft.com/office/drawing/2014/main" id="{BF720430-907D-A87D-B043-F90C0D106BAC}"/>
+                <a16:creationId xmlns:a16="http://schemas.microsoft.com/office/drawing/2014/main" id="{C911E49A-8595-0ED7-D951-BDF62F02AC03}"/>
               </a:ext>
             </a:extLst>
           </p:cNvPr>
@@ -3251,7 +3251,7 @@
           <p:cNvPr id="6" name="スライド番号プレースホルダー 5">
             <a:extLst>
               <a:ext uri="{FF2B5EF4-FFF2-40B4-BE49-F238E27FC236}">
-                <a16:creationId xmlns:a16="http://schemas.microsoft.com/office/drawing/2014/main" id="{92CC5E02-39A9-CC92-975D-04AE515E3897}"/>
+                <a16:creationId xmlns:a16="http://schemas.microsoft.com/office/drawing/2014/main" id="{81CD8306-E59F-9516-AFE3-21CF0386141E}"/>
               </a:ext>
             </a:extLst>
           </p:cNvPr>
@@ -3285,7 +3285,7 @@
             </a:lvl1pPr>
           </a:lstStyle>
           <a:p>
-            <a:fld id="{98CDB7A6-B724-4084-9325-B8E8EC2C1071}" type="slidenum">
+            <a:fld id="{EF76F379-17DE-44B4-9186-B977EFFAAEA0}" type="slidenum">
               <a:rPr kumimoji="1" lang="ja-JP" altLang="en-US" smtClean="0"/>
               <a:t>‹#›</a:t>
             </a:fld>
@@ -3296,7 +3296,7 @@
     </p:spTree>
     <p:extLst>
       <p:ext uri="{BB962C8B-B14F-4D97-AF65-F5344CB8AC3E}">
-        <p14:creationId xmlns:p14="http://schemas.microsoft.com/office/powerpoint/2010/main" val="3930171290"/>
+        <p14:creationId xmlns:p14="http://schemas.microsoft.com/office/powerpoint/2010/main" val="3838856860"/>
       </p:ext>
     </p:extLst>
   </p:cSld>
@@ -3619,7 +3619,7 @@
           <p:cNvPr id="2" name="テキスト ボックス 1">
             <a:extLst>
               <a:ext uri="{FF2B5EF4-FFF2-40B4-BE49-F238E27FC236}">
-                <a16:creationId xmlns:a16="http://schemas.microsoft.com/office/drawing/2014/main" id="{D051CF40-DC88-ACBC-4CA9-31E3F62D3C97}"/>
+                <a16:creationId xmlns:a16="http://schemas.microsoft.com/office/drawing/2014/main" id="{C3F506BB-6E21-F525-4C6D-CB75BDF79708}"/>
               </a:ext>
             </a:extLst>
           </p:cNvPr>
@@ -3665,7 +3665,7 @@
           <p:cNvPr id="3" name="テキスト ボックス 2">
             <a:extLst>
               <a:ext uri="{FF2B5EF4-FFF2-40B4-BE49-F238E27FC236}">
-                <a16:creationId xmlns:a16="http://schemas.microsoft.com/office/drawing/2014/main" id="{29BC5ADB-06B6-DAE0-684C-2C8E5D4B1F59}"/>
+                <a16:creationId xmlns:a16="http://schemas.microsoft.com/office/drawing/2014/main" id="{AD445647-03E4-725F-0C0C-0055B4EFB2D9}"/>
               </a:ext>
             </a:extLst>
           </p:cNvPr>
@@ -3714,7 +3714,7 @@
           <p:cNvPr id="4" name="テキスト ボックス 3">
             <a:extLst>
               <a:ext uri="{FF2B5EF4-FFF2-40B4-BE49-F238E27FC236}">
-                <a16:creationId xmlns:a16="http://schemas.microsoft.com/office/drawing/2014/main" id="{F4E2D1F0-E064-9A28-541D-D7A7716C39AE}"/>
+                <a16:creationId xmlns:a16="http://schemas.microsoft.com/office/drawing/2014/main" id="{FBBC661F-2648-732E-4C67-E7971105E10F}"/>
               </a:ext>
             </a:extLst>
           </p:cNvPr>
@@ -3754,7 +3754,7 @@
           <p:cNvPr id="5" name="テキスト ボックス 4">
             <a:extLst>
               <a:ext uri="{FF2B5EF4-FFF2-40B4-BE49-F238E27FC236}">
-                <a16:creationId xmlns:a16="http://schemas.microsoft.com/office/drawing/2014/main" id="{2DD8B8B8-9A81-2B4E-AF80-036B3A0F3374}"/>
+                <a16:creationId xmlns:a16="http://schemas.microsoft.com/office/drawing/2014/main" id="{E1207416-FDE5-5C9C-BE29-A96039EA6618}"/>
               </a:ext>
             </a:extLst>
           </p:cNvPr>
@@ -3801,7 +3801,7 @@
             <a:hlinkClick r:id="" action="ppaction://media"/>
             <a:extLst>
               <a:ext uri="{FF2B5EF4-FFF2-40B4-BE49-F238E27FC236}">
-                <a16:creationId xmlns:a16="http://schemas.microsoft.com/office/drawing/2014/main" id="{7020D999-D96D-BC03-3ED3-C7792658C6D7}"/>
+                <a16:creationId xmlns:a16="http://schemas.microsoft.com/office/drawing/2014/main" id="{2BB420DD-4920-09A2-D655-925FE5219219}"/>
               </a:ext>
             </a:extLst>
           </p:cNvPr>
@@ -3836,7 +3836,7 @@
     </p:spTree>
     <p:extLst>
       <p:ext uri="{BB962C8B-B14F-4D97-AF65-F5344CB8AC3E}">
-        <p14:creationId xmlns:p14="http://schemas.microsoft.com/office/powerpoint/2010/main" val="2719959836"/>
+        <p14:creationId xmlns:p14="http://schemas.microsoft.com/office/powerpoint/2010/main" val="4206099348"/>
       </p:ext>
     </p:extLst>
   </p:cSld>
@@ -3960,7 +3960,7 @@
           <p:cNvPr id="2" name="テキスト ボックス 1">
             <a:extLst>
               <a:ext uri="{FF2B5EF4-FFF2-40B4-BE49-F238E27FC236}">
-                <a16:creationId xmlns:a16="http://schemas.microsoft.com/office/drawing/2014/main" id="{C332EAC5-8CE8-1FD5-1C2C-F1C60F90D5C5}"/>
+                <a16:creationId xmlns:a16="http://schemas.microsoft.com/office/drawing/2014/main" id="{6963AE2D-25DE-E6BF-4E05-31FF863F277B}"/>
               </a:ext>
             </a:extLst>
           </p:cNvPr>
@@ -4006,7 +4006,7 @@
           <p:cNvPr id="3" name="テキスト ボックス 2">
             <a:extLst>
               <a:ext uri="{FF2B5EF4-FFF2-40B4-BE49-F238E27FC236}">
-                <a16:creationId xmlns:a16="http://schemas.microsoft.com/office/drawing/2014/main" id="{A7F974A8-980B-7E41-6826-3F5E80BBBCD9}"/>
+                <a16:creationId xmlns:a16="http://schemas.microsoft.com/office/drawing/2014/main" id="{31D12C2A-6B53-B82A-DFAB-B79DC80B1B26}"/>
               </a:ext>
             </a:extLst>
           </p:cNvPr>
@@ -4046,7 +4046,7 @@
           <p:cNvPr id="4" name="テキスト ボックス 3">
             <a:extLst>
               <a:ext uri="{FF2B5EF4-FFF2-40B4-BE49-F238E27FC236}">
-                <a16:creationId xmlns:a16="http://schemas.microsoft.com/office/drawing/2014/main" id="{8B8FF96A-92DF-5A9D-B234-7BEACCD9C963}"/>
+                <a16:creationId xmlns:a16="http://schemas.microsoft.com/office/drawing/2014/main" id="{74FF74D4-D4BD-8FC8-7A56-AD3AD252C2DF}"/>
               </a:ext>
             </a:extLst>
           </p:cNvPr>
@@ -4110,7 +4110,7 @@
           <p:cNvPr id="5" name="テキスト ボックス 4">
             <a:extLst>
               <a:ext uri="{FF2B5EF4-FFF2-40B4-BE49-F238E27FC236}">
-                <a16:creationId xmlns:a16="http://schemas.microsoft.com/office/drawing/2014/main" id="{C89BC1C6-2700-7ECD-371D-5123026532AC}"/>
+                <a16:creationId xmlns:a16="http://schemas.microsoft.com/office/drawing/2014/main" id="{34768CF2-8A52-2009-23B1-668ECFEA4A6A}"/>
               </a:ext>
             </a:extLst>
           </p:cNvPr>
@@ -4157,7 +4157,7 @@
             <a:hlinkClick r:id="" action="ppaction://media"/>
             <a:extLst>
               <a:ext uri="{FF2B5EF4-FFF2-40B4-BE49-F238E27FC236}">
-                <a16:creationId xmlns:a16="http://schemas.microsoft.com/office/drawing/2014/main" id="{1A1637F7-AE70-2773-014F-58695FF86AE4}"/>
+                <a16:creationId xmlns:a16="http://schemas.microsoft.com/office/drawing/2014/main" id="{D24C13E8-0538-EDB0-CD3A-D5160892F8DA}"/>
               </a:ext>
             </a:extLst>
           </p:cNvPr>
@@ -4192,7 +4192,7 @@
     </p:spTree>
     <p:extLst>
       <p:ext uri="{BB962C8B-B14F-4D97-AF65-F5344CB8AC3E}">
-        <p14:creationId xmlns:p14="http://schemas.microsoft.com/office/powerpoint/2010/main" val="1911733119"/>
+        <p14:creationId xmlns:p14="http://schemas.microsoft.com/office/powerpoint/2010/main" val="3736023205"/>
       </p:ext>
     </p:extLst>
   </p:cSld>
@@ -4316,7 +4316,7 @@
           <p:cNvPr id="2" name="テキスト ボックス 1">
             <a:extLst>
               <a:ext uri="{FF2B5EF4-FFF2-40B4-BE49-F238E27FC236}">
-                <a16:creationId xmlns:a16="http://schemas.microsoft.com/office/drawing/2014/main" id="{1FB515D5-A864-F942-280F-48D5384F3869}"/>
+                <a16:creationId xmlns:a16="http://schemas.microsoft.com/office/drawing/2014/main" id="{3A62BA66-33E8-BE2F-473A-FE5D5FCE950E}"/>
               </a:ext>
             </a:extLst>
           </p:cNvPr>
@@ -4362,7 +4362,7 @@
           <p:cNvPr id="3" name="テキスト ボックス 2">
             <a:extLst>
               <a:ext uri="{FF2B5EF4-FFF2-40B4-BE49-F238E27FC236}">
-                <a16:creationId xmlns:a16="http://schemas.microsoft.com/office/drawing/2014/main" id="{56EB583C-6B7C-071B-3029-602A8152B720}"/>
+                <a16:creationId xmlns:a16="http://schemas.microsoft.com/office/drawing/2014/main" id="{3DFC683A-B05B-00F5-FBD5-247BA83F197A}"/>
               </a:ext>
             </a:extLst>
           </p:cNvPr>
@@ -4402,7 +4402,7 @@
           <p:cNvPr id="4" name="テキスト ボックス 3">
             <a:extLst>
               <a:ext uri="{FF2B5EF4-FFF2-40B4-BE49-F238E27FC236}">
-                <a16:creationId xmlns:a16="http://schemas.microsoft.com/office/drawing/2014/main" id="{EE83DAE8-2175-C2E4-2575-A433F77AE03E}"/>
+                <a16:creationId xmlns:a16="http://schemas.microsoft.com/office/drawing/2014/main" id="{574B5B08-6143-22BF-4D0F-FD5361FFAC97}"/>
               </a:ext>
             </a:extLst>
           </p:cNvPr>
@@ -4497,7 +4497,7 @@
           <p:cNvPr id="5" name="テキスト ボックス 4">
             <a:extLst>
               <a:ext uri="{FF2B5EF4-FFF2-40B4-BE49-F238E27FC236}">
-                <a16:creationId xmlns:a16="http://schemas.microsoft.com/office/drawing/2014/main" id="{DA2BC68F-37FB-CEA5-CB7F-A5DB798278AB}"/>
+                <a16:creationId xmlns:a16="http://schemas.microsoft.com/office/drawing/2014/main" id="{CEFC0D40-0B41-B53D-C0DB-D3883F037024}"/>
               </a:ext>
             </a:extLst>
           </p:cNvPr>
@@ -4544,7 +4544,7 @@
             <a:hlinkClick r:id="" action="ppaction://media"/>
             <a:extLst>
               <a:ext uri="{FF2B5EF4-FFF2-40B4-BE49-F238E27FC236}">
-                <a16:creationId xmlns:a16="http://schemas.microsoft.com/office/drawing/2014/main" id="{3B1A8B4F-7686-5E80-85D2-AB0F05346877}"/>
+                <a16:creationId xmlns:a16="http://schemas.microsoft.com/office/drawing/2014/main" id="{15A0B8AF-1407-3CB9-8CA7-9E9CB968E887}"/>
               </a:ext>
             </a:extLst>
           </p:cNvPr>
@@ -4579,7 +4579,7 @@
     </p:spTree>
     <p:extLst>
       <p:ext uri="{BB962C8B-B14F-4D97-AF65-F5344CB8AC3E}">
-        <p14:creationId xmlns:p14="http://schemas.microsoft.com/office/powerpoint/2010/main" val="2304821265"/>
+        <p14:creationId xmlns:p14="http://schemas.microsoft.com/office/powerpoint/2010/main" val="2364079405"/>
       </p:ext>
     </p:extLst>
   </p:cSld>
@@ -4703,7 +4703,7 @@
           <p:cNvPr id="2" name="テキスト ボックス 1">
             <a:extLst>
               <a:ext uri="{FF2B5EF4-FFF2-40B4-BE49-F238E27FC236}">
-                <a16:creationId xmlns:a16="http://schemas.microsoft.com/office/drawing/2014/main" id="{81898482-E602-8BBA-CBBC-588F0CDF9B3E}"/>
+                <a16:creationId xmlns:a16="http://schemas.microsoft.com/office/drawing/2014/main" id="{7292E4ED-CD14-A363-16BF-01F2DC470649}"/>
               </a:ext>
             </a:extLst>
           </p:cNvPr>
@@ -4749,7 +4749,7 @@
           <p:cNvPr id="3" name="テキスト ボックス 2">
             <a:extLst>
               <a:ext uri="{FF2B5EF4-FFF2-40B4-BE49-F238E27FC236}">
-                <a16:creationId xmlns:a16="http://schemas.microsoft.com/office/drawing/2014/main" id="{DF83BA3F-FE6E-A095-D98C-A6695692698E}"/>
+                <a16:creationId xmlns:a16="http://schemas.microsoft.com/office/drawing/2014/main" id="{05CBE8F2-0ABC-E78C-EF26-596113BCFFDE}"/>
               </a:ext>
             </a:extLst>
           </p:cNvPr>
@@ -4789,7 +4789,7 @@
           <p:cNvPr id="4" name="テキスト ボックス 3">
             <a:extLst>
               <a:ext uri="{FF2B5EF4-FFF2-40B4-BE49-F238E27FC236}">
-                <a16:creationId xmlns:a16="http://schemas.microsoft.com/office/drawing/2014/main" id="{BCD03804-18EC-96F3-1B08-0763B653B6FC}"/>
+                <a16:creationId xmlns:a16="http://schemas.microsoft.com/office/drawing/2014/main" id="{E8B9883D-A1FA-6A1E-BCAE-38599D74122C}"/>
               </a:ext>
             </a:extLst>
           </p:cNvPr>
@@ -4899,7 +4899,7 @@
           <p:cNvPr id="5" name="テキスト ボックス 4">
             <a:extLst>
               <a:ext uri="{FF2B5EF4-FFF2-40B4-BE49-F238E27FC236}">
-                <a16:creationId xmlns:a16="http://schemas.microsoft.com/office/drawing/2014/main" id="{3A36DD2B-62F3-755D-9D65-55333D6A8B58}"/>
+                <a16:creationId xmlns:a16="http://schemas.microsoft.com/office/drawing/2014/main" id="{53726DF6-B4A5-E025-2C8C-B5709E2E6502}"/>
               </a:ext>
             </a:extLst>
           </p:cNvPr>
@@ -4946,7 +4946,7 @@
             <a:hlinkClick r:id="" action="ppaction://media"/>
             <a:extLst>
               <a:ext uri="{FF2B5EF4-FFF2-40B4-BE49-F238E27FC236}">
-                <a16:creationId xmlns:a16="http://schemas.microsoft.com/office/drawing/2014/main" id="{54624A76-714F-4000-1492-C3C5359516E9}"/>
+                <a16:creationId xmlns:a16="http://schemas.microsoft.com/office/drawing/2014/main" id="{1FA107E3-D8E0-71D5-6F2F-F4A095E43286}"/>
               </a:ext>
             </a:extLst>
           </p:cNvPr>
@@ -4981,7 +4981,7 @@
     </p:spTree>
     <p:extLst>
       <p:ext uri="{BB962C8B-B14F-4D97-AF65-F5344CB8AC3E}">
-        <p14:creationId xmlns:p14="http://schemas.microsoft.com/office/powerpoint/2010/main" val="2437178011"/>
+        <p14:creationId xmlns:p14="http://schemas.microsoft.com/office/powerpoint/2010/main" val="3746910928"/>
       </p:ext>
     </p:extLst>
   </p:cSld>
@@ -5105,7 +5105,7 @@
           <p:cNvPr id="2" name="テキスト ボックス 1">
             <a:extLst>
               <a:ext uri="{FF2B5EF4-FFF2-40B4-BE49-F238E27FC236}">
-                <a16:creationId xmlns:a16="http://schemas.microsoft.com/office/drawing/2014/main" id="{504243AB-4D5C-FC7E-7DE1-2878DB763D42}"/>
+                <a16:creationId xmlns:a16="http://schemas.microsoft.com/office/drawing/2014/main" id="{3C87327F-3E29-C5EB-612D-79393FE48D6D}"/>
               </a:ext>
             </a:extLst>
           </p:cNvPr>
@@ -5151,7 +5151,7 @@
           <p:cNvPr id="3" name="テキスト ボックス 2">
             <a:extLst>
               <a:ext uri="{FF2B5EF4-FFF2-40B4-BE49-F238E27FC236}">
-                <a16:creationId xmlns:a16="http://schemas.microsoft.com/office/drawing/2014/main" id="{EEE6F829-6DDB-632D-5E7B-0D2BB783D146}"/>
+                <a16:creationId xmlns:a16="http://schemas.microsoft.com/office/drawing/2014/main" id="{9F211B4D-8480-F2F3-DC2F-3FCD03A11578}"/>
               </a:ext>
             </a:extLst>
           </p:cNvPr>
@@ -5191,7 +5191,7 @@
           <p:cNvPr id="4" name="テキスト ボックス 3">
             <a:extLst>
               <a:ext uri="{FF2B5EF4-FFF2-40B4-BE49-F238E27FC236}">
-                <a16:creationId xmlns:a16="http://schemas.microsoft.com/office/drawing/2014/main" id="{E3CD9B88-6E1E-7BEA-4BB4-9FBC55C7A76A}"/>
+                <a16:creationId xmlns:a16="http://schemas.microsoft.com/office/drawing/2014/main" id="{9CA2C10A-9C13-B8FB-20B4-BBCE38FFB190}"/>
               </a:ext>
             </a:extLst>
           </p:cNvPr>
@@ -5215,20 +5215,14 @@
           <a:lstStyle/>
           <a:p>
             <a:r>
-              <a:rPr kumimoji="1" lang="en-US" altLang="ja-JP" sz="2000">
+              <a:rPr kumimoji="1" lang="ja-JP" altLang="en-US" sz="2000">
                 <a:solidFill>
                   <a:srgbClr val="333333"/>
                 </a:solidFill>
                 <a:latin typeface="Arial" panose="020B0604020202020204" pitchFamily="34" charset="0"/>
               </a:rPr>
-              <a:t>Set confirmed custom domain</a:t>
-            </a:r>
-            <a:endParaRPr kumimoji="1" lang="ja-JP" altLang="en-US" sz="2000">
-              <a:solidFill>
-                <a:srgbClr val="333333"/>
-              </a:solidFill>
-              <a:latin typeface="Arial" panose="020B0604020202020204" pitchFamily="34" charset="0"/>
-            </a:endParaRPr>
+              <a:t>直近のコミットでは、実装の見直しと継続的な改善が行われました。</a:t>
+            </a:r>
           </a:p>
         </p:txBody>
       </p:sp>
@@ -5237,7 +5231,7 @@
           <p:cNvPr id="5" name="テキスト ボックス 4">
             <a:extLst>
               <a:ext uri="{FF2B5EF4-FFF2-40B4-BE49-F238E27FC236}">
-                <a16:creationId xmlns:a16="http://schemas.microsoft.com/office/drawing/2014/main" id="{705098DF-D81D-1C4E-DFDA-78A03D082EC4}"/>
+                <a16:creationId xmlns:a16="http://schemas.microsoft.com/office/drawing/2014/main" id="{89DE7E29-9730-E482-64BE-431200470BFD}"/>
               </a:ext>
             </a:extLst>
           </p:cNvPr>
@@ -5284,7 +5278,7 @@
             <a:hlinkClick r:id="" action="ppaction://media"/>
             <a:extLst>
               <a:ext uri="{FF2B5EF4-FFF2-40B4-BE49-F238E27FC236}">
-                <a16:creationId xmlns:a16="http://schemas.microsoft.com/office/drawing/2014/main" id="{EFD7F358-BDB4-D2F0-BB66-86291E5A5C72}"/>
+                <a16:creationId xmlns:a16="http://schemas.microsoft.com/office/drawing/2014/main" id="{5A35D83B-0CB1-DD9D-7485-2F4617E2F90E}"/>
               </a:ext>
             </a:extLst>
           </p:cNvPr>
@@ -5319,7 +5313,7 @@
     </p:spTree>
     <p:extLst>
       <p:ext uri="{BB962C8B-B14F-4D97-AF65-F5344CB8AC3E}">
-        <p14:creationId xmlns:p14="http://schemas.microsoft.com/office/powerpoint/2010/main" val="759288770"/>
+        <p14:creationId xmlns:p14="http://schemas.microsoft.com/office/powerpoint/2010/main" val="3121448847"/>
       </p:ext>
     </p:extLst>
   </p:cSld>
@@ -5362,7 +5356,7 @@
                                   <p:childTnLst>
                                     <p:cmd type="call" cmd="playFrom(0.0)">
                                       <p:cBhvr>
-                                        <p:cTn id="6" dur="6451" fill="hold"/>
+                                        <p:cTn id="6" dur="6076" fill="hold"/>
                                         <p:tgtEl>
                                           <p:spTgt spid="6"/>
                                         </p:tgtEl>
@@ -5443,7 +5437,7 @@
           <p:cNvPr id="2" name="テキスト ボックス 1">
             <a:extLst>
               <a:ext uri="{FF2B5EF4-FFF2-40B4-BE49-F238E27FC236}">
-                <a16:creationId xmlns:a16="http://schemas.microsoft.com/office/drawing/2014/main" id="{86AE7802-3F66-DE69-9304-62D92FE51FA5}"/>
+                <a16:creationId xmlns:a16="http://schemas.microsoft.com/office/drawing/2014/main" id="{6C2F36F9-3021-5DC3-519D-5F8976B2A1C9}"/>
               </a:ext>
             </a:extLst>
           </p:cNvPr>
@@ -5489,7 +5483,7 @@
           <p:cNvPr id="3" name="テキスト ボックス 2">
             <a:extLst>
               <a:ext uri="{FF2B5EF4-FFF2-40B4-BE49-F238E27FC236}">
-                <a16:creationId xmlns:a16="http://schemas.microsoft.com/office/drawing/2014/main" id="{6BD30AAA-F101-B897-0BD1-FB550F7A1C8C}"/>
+                <a16:creationId xmlns:a16="http://schemas.microsoft.com/office/drawing/2014/main" id="{5AF7EB9B-88C2-A98B-D269-4FA289F17F9B}"/>
               </a:ext>
             </a:extLst>
           </p:cNvPr>
@@ -5529,7 +5523,7 @@
           <p:cNvPr id="4" name="テキスト ボックス 3">
             <a:extLst>
               <a:ext uri="{FF2B5EF4-FFF2-40B4-BE49-F238E27FC236}">
-                <a16:creationId xmlns:a16="http://schemas.microsoft.com/office/drawing/2014/main" id="{9414B417-CFE9-C431-AFA8-D5FA26FA8D59}"/>
+                <a16:creationId xmlns:a16="http://schemas.microsoft.com/office/drawing/2014/main" id="{B259E8DC-8BD0-E991-36D7-E51F58DDBCC1}"/>
               </a:ext>
             </a:extLst>
           </p:cNvPr>
@@ -5594,7 +5588,7 @@
           <p:cNvPr id="5" name="テキスト ボックス 4">
             <a:extLst>
               <a:ext uri="{FF2B5EF4-FFF2-40B4-BE49-F238E27FC236}">
-                <a16:creationId xmlns:a16="http://schemas.microsoft.com/office/drawing/2014/main" id="{24E904B7-E17F-84DD-5E2D-A76D146A197F}"/>
+                <a16:creationId xmlns:a16="http://schemas.microsoft.com/office/drawing/2014/main" id="{976E2F89-361A-2EA6-073A-D38D901F0B78}"/>
               </a:ext>
             </a:extLst>
           </p:cNvPr>
@@ -5641,7 +5635,7 @@
             <a:hlinkClick r:id="" action="ppaction://media"/>
             <a:extLst>
               <a:ext uri="{FF2B5EF4-FFF2-40B4-BE49-F238E27FC236}">
-                <a16:creationId xmlns:a16="http://schemas.microsoft.com/office/drawing/2014/main" id="{1EF53101-C8AF-22E0-911B-FC75E69FC97E}"/>
+                <a16:creationId xmlns:a16="http://schemas.microsoft.com/office/drawing/2014/main" id="{11249310-1241-BF55-B131-52719C42D3B4}"/>
               </a:ext>
             </a:extLst>
           </p:cNvPr>
@@ -5676,7 +5670,7 @@
     </p:spTree>
     <p:extLst>
       <p:ext uri="{BB962C8B-B14F-4D97-AF65-F5344CB8AC3E}">
-        <p14:creationId xmlns:p14="http://schemas.microsoft.com/office/powerpoint/2010/main" val="1590440593"/>
+        <p14:creationId xmlns:p14="http://schemas.microsoft.com/office/powerpoint/2010/main" val="3635005392"/>
       </p:ext>
     </p:extLst>
   </p:cSld>
